--- a/en/slides/17-Computer_Architecture-Verm1_Part_3-Lab.pptx
+++ b/en/slides/17-Computer_Architecture-Verm1_Part_3-Lab.pptx
@@ -143,25 +143,25 @@
   <p:extLst>
     <p:ext uri="{521415D9-36F7-43E2-AB2F-B90AF26B5E84}">
       <p14:sectionLst xmlns:p14="http://schemas.microsoft.com/office/powerpoint/2010/main">
-        <p14:section name="Opening" id="{c90aa57c-df61-cd4a-c7ea-aee9f3367238}">
+        <p14:section name="Opening" id="{c56d7c8a-4db0-033e-9e12-7add5a9598d2}">
           <p14:sldIdLst>
             <p14:sldId id="256"/>
             <p14:sldId id="257"/>
           </p14:sldIdLst>
         </p14:section>
-        <p14:section name="The listings" id="{cabe7e74-3611-7299-85e6-dc8e575d0163}">
+        <p14:section name="The listings" id="{5f52ead1-a270-8157-5038-c351ad5e0d86}">
           <p14:sldIdLst>
             <p14:sldId id="258"/>
           </p14:sldIdLst>
         </p14:section>
-        <p14:section name="Step 1: the memory of the game" id="{9b143023-b9bb-a03d-0972-38c256854d69}">
+        <p14:section name="Step 1: the memory of the game" id="{c03fca4b-fcdf-ab6a-37c5-0adf2e36dd16}">
           <p14:sldIdLst>
             <p14:sldId id="259"/>
             <p14:sldId id="260"/>
             <p14:sldId id="261"/>
           </p14:sldIdLst>
         </p14:section>
-        <p14:section name="Step 2: three states" id="{c9c07056-7b9b-6c4f-c39f-ffa65ea6a457}">
+        <p14:section name="Step 2: three states" id="{2a51ad9a-d7d1-7923-c294-8caae22170df}">
           <p14:sldIdLst>
             <p14:sldId id="262"/>
             <p14:sldId id="263"/>
@@ -172,7 +172,7 @@
             <p14:sldId id="268"/>
           </p14:sldIdLst>
         </p14:section>
-        <p14:section name="Step 3: a worm in memory" id="{d6be75d6-6ed5-a685-f747-49f5043535d1}">
+        <p14:section name="Step 3: a worm in memory" id="{62646f01-b6fb-95fc-643b-c9b46afb64c4}">
           <p14:sldIdLst>
             <p14:sldId id="269"/>
             <p14:sldId id="270"/>
@@ -182,7 +182,7 @@
             <p14:sldId id="274"/>
           </p14:sldIdLst>
         </p14:section>
-        <p14:section name="Step 4: rules" id="{e77eb31c-4ae4-2c04-65b3-bebe10703379}">
+        <p14:section name="Step 4: rules" id="{b6e8da52-ba2b-2454-b575-d5ae2e1276e6}">
           <p14:sldIdLst>
             <p14:sldId id="275"/>
             <p14:sldId id="276"/>
@@ -195,14 +195,14 @@
             <p14:sldId id="283"/>
           </p14:sldIdLst>
         </p14:section>
-        <p14:section name="Step 5: look at memory move" id="{57e621e5-70f4-6aa0-4cd8-52f9284971d1}">
+        <p14:section name="Step 5: look at memory move" id="{90531bd0-ee00-38f2-b55c-dacecffdc494}">
           <p14:sldIdLst>
             <p14:sldId id="284"/>
             <p14:sldId id="285"/>
             <p14:sldId id="286"/>
           </p14:sldIdLst>
         </p14:section>
-        <p14:section name="Run it and test it" id="{88483877-c00e-104e-5bee-178adece3002}">
+        <p14:section name="Run it and test it" id="{6019b453-6e14-d182-7391-2361deee1430}">
           <p14:sldIdLst>
             <p14:sldId id="287"/>
             <p14:sldId id="288"/>
@@ -211,7 +211,7 @@
             <p14:sldId id="291"/>
           </p14:sldIdLst>
         </p14:section>
-        <p14:section name="Exercises" id="{4ad30ce0-27a4-f4ce-277e-43e2189f1200}">
+        <p14:section name="Exercises" id="{53d5cff2-1d94-8130-9deb-0606ee2dcee5}">
           <p14:sldIdLst>
             <p14:sldId id="292"/>
           </p14:sldIdLst>

--- a/en/slides/17-Computer_Architecture-Verm1_Part_3-Lab.pptx
+++ b/en/slides/17-Computer_Architecture-Verm1_Part_3-Lab.pptx
@@ -143,25 +143,25 @@
   <p:extLst>
     <p:ext uri="{521415D9-36F7-43E2-AB2F-B90AF26B5E84}">
       <p14:sectionLst xmlns:p14="http://schemas.microsoft.com/office/powerpoint/2010/main">
-        <p14:section name="Opening" id="{c56d7c8a-4db0-033e-9e12-7add5a9598d2}">
+        <p14:section name="Opening" id="{99baff00-db9b-991a-67e6-2fea96301ff0}">
           <p14:sldIdLst>
             <p14:sldId id="256"/>
             <p14:sldId id="257"/>
           </p14:sldIdLst>
         </p14:section>
-        <p14:section name="The listings" id="{5f52ead1-a270-8157-5038-c351ad5e0d86}">
+        <p14:section name="The listings" id="{62925b99-5669-42da-5a9f-8ee9450565de}">
           <p14:sldIdLst>
             <p14:sldId id="258"/>
           </p14:sldIdLst>
         </p14:section>
-        <p14:section name="Step 1: the memory of the game" id="{c03fca4b-fcdf-ab6a-37c5-0adf2e36dd16}">
+        <p14:section name="Step 1: the memory of the game" id="{46009563-ee50-423e-ea64-d7b125ad06d7}">
           <p14:sldIdLst>
             <p14:sldId id="259"/>
             <p14:sldId id="260"/>
             <p14:sldId id="261"/>
           </p14:sldIdLst>
         </p14:section>
-        <p14:section name="Step 2: three states" id="{2a51ad9a-d7d1-7923-c294-8caae22170df}">
+        <p14:section name="Step 2: three states" id="{26aab86f-a910-a271-1463-4a5859215567}">
           <p14:sldIdLst>
             <p14:sldId id="262"/>
             <p14:sldId id="263"/>
@@ -172,7 +172,7 @@
             <p14:sldId id="268"/>
           </p14:sldIdLst>
         </p14:section>
-        <p14:section name="Step 3: a worm in memory" id="{62646f01-b6fb-95fc-643b-c9b46afb64c4}">
+        <p14:section name="Step 3: a worm in memory" id="{e24bf1db-01c7-fc45-b8b1-d56efa16e723}">
           <p14:sldIdLst>
             <p14:sldId id="269"/>
             <p14:sldId id="270"/>
@@ -182,7 +182,7 @@
             <p14:sldId id="274"/>
           </p14:sldIdLst>
         </p14:section>
-        <p14:section name="Step 4: rules" id="{b6e8da52-ba2b-2454-b575-d5ae2e1276e6}">
+        <p14:section name="Step 4: rules" id="{5ec1ca8b-681e-76ac-0e6a-8add12be6349}">
           <p14:sldIdLst>
             <p14:sldId id="275"/>
             <p14:sldId id="276"/>
@@ -195,14 +195,14 @@
             <p14:sldId id="283"/>
           </p14:sldIdLst>
         </p14:section>
-        <p14:section name="Step 5: look at memory move" id="{90531bd0-ee00-38f2-b55c-dacecffdc494}">
+        <p14:section name="Step 5: look at memory move" id="{88baecbd-26dc-9327-7e76-72270cb2a1f4}">
           <p14:sldIdLst>
             <p14:sldId id="284"/>
             <p14:sldId id="285"/>
             <p14:sldId id="286"/>
           </p14:sldIdLst>
         </p14:section>
-        <p14:section name="Run it and test it" id="{6019b453-6e14-d182-7391-2361deee1430}">
+        <p14:section name="Run it and test it" id="{0d5c081e-2286-066a-252d-466ca7425da9}">
           <p14:sldIdLst>
             <p14:sldId id="287"/>
             <p14:sldId id="288"/>
@@ -211,7 +211,7 @@
             <p14:sldId id="291"/>
           </p14:sldIdLst>
         </p14:section>
-        <p14:section name="Exercises" id="{53d5cff2-1d94-8130-9deb-0606ee2dcee5}">
+        <p14:section name="Exercises" id="{0aa3a3f3-928f-3bce-dc47-cfc98278ce63}">
           <p14:sldIdLst>
             <p14:sldId id="292"/>
           </p14:sldIdLst>
@@ -622,7 +622,8 @@
               <a:rPr lang="en-US" dirty="0"/>
               <a:t>This is the code deck of Lecture 17. Where the lecture deck develops the concepts, this deck contains everything that is written and executed: each listing with its commentary, the complete program of the lecture, the output it is expected to produce, and the procedure for testing it on each of the three hosts. The two decks are meant to be read together: the concepts explain the code, and the code gives the concepts an observable consequence.
 Learning status: UNDERSTAND NOW, by the end of this lecture you explain it, trace it and apply it on your own; USE NOW, you follow and use the recipe today; how it works inside is explained later, or is not part of the course; UNDERSTAND LATER, recognise the name and what it is for; a later lecture explains it. A slide without a badge is context: a story, an example, a question, an exercise.
-Learning status of this lecture. UNDERSTAND NOW: arrays in memory; finite-state machines; .text, .rodata, .data; latches and flip-flops; fixed point. USE NOW: the calling convention (Lecture 18) and, used without being studied in this course, the PRG32 tools, the PRG32-QT debugger. UNDERSTAND LATER: nothing. A slide without a badge is context: a story, an example, a question, an exercise.</a:t>
+Learning status of this lecture. UNDERSTAND NOW: arrays in memory; finite-state machines; .text, .rodata, .data; latches and flip-flops; fixed point. USE NOW: the calling convention (Lecture 18) and, used without being studied in this course, the PRG32 tools, the PRG32-QT debugger. UNDERSTAND LATER: nothing. A slide without a badge is context: a story, an example, a question, an exercise.
+Roadmap. Today's outcomes: (1) implement the game as a state machine with three states; (2) keep the body in a ring buffer and the grid in an array of bytes; (3) detect a collision by reading the grid. Builds on: arrays in memory (Lecture 04); finite-state machines (Lecture 13); .text, .rodata, .data (Lecture 07); latches and flip-flops (Lecture 13); fixed point (Lecture 06). Next: Lecture 18, The Processor.</a:t>
             </a:r>
             <a:endParaRPr lang="en-US" dirty="0"/>
           </a:p>
